--- a/assets/pptx/catalog-752.pptx
+++ b/assets/pptx/catalog-752.pptx
@@ -3264,7 +3264,7 @@
                 <a:ea typeface="Ebrima"/>
                 <a:cs typeface="Ebrima"/>
               </a:rPr>
-              <a:t>አንድ ቀን ኢየሱስ ዓይኔን ከፍቶት አየሁ (3x)</a:t>
+              <a:t>አንድ ቀን ኢየሱስ ዓይኔን ከፍቶት አየሁ 3x</a:t>
             </a:r>
           </a:p>
           <a:p>
@@ -3367,7 +3367,7 @@
                 <a:ea typeface="Ebrima"/>
                 <a:cs typeface="Ebrima"/>
               </a:rPr>
-              <a:t>ዓይኔን ከፈተልኝ ኢየሱስ ሥሙ ይክበር (3x)</a:t>
+              <a:t>ዓይኔን ከፈተልኝ ኢየሱስ ሥሙ ይክበር 3x</a:t>
             </a:r>
           </a:p>
           <a:p>
@@ -3470,7 +3470,7 @@
                 <a:ea typeface="Ebrima"/>
                 <a:cs typeface="Ebrima"/>
               </a:rPr>
-              <a:t>አንድ ኢየሱስ ብቻ እረዳት ሆነልኝ (3x)</a:t>
+              <a:t>አንድ ኢየሱስ ብቻ እረዳት ሆነልኝ 3x</a:t>
             </a:r>
           </a:p>
           <a:p>
@@ -3573,7 +3573,7 @@
                 <a:ea typeface="Ebrima"/>
                 <a:cs typeface="Ebrima"/>
               </a:rPr>
-              <a:t>አሁን ግን እንደማይ ይህንን አውቃለሁ ሥሙ ይክበር (2x)</a:t>
+              <a:t>አሁን ግን እንደማይ ይህንን አውቃለሁ ሥሙ ይክበር 2x</a:t>
             </a:r>
           </a:p>
           <a:p>
@@ -3676,7 +3676,7 @@
                 <a:ea typeface="Ebrima"/>
                 <a:cs typeface="Ebrima"/>
               </a:rPr>
-              <a:t>ጌታን አመልካለሁ የሕይወቴን ከለላ (3x)</a:t>
+              <a:t>ጌታን አመልካለሁ የሕይወቴን ከለላ 3x</a:t>
             </a:r>
           </a:p>
           <a:p>
@@ -3779,7 +3779,7 @@
                 <a:ea typeface="Ebrima"/>
                 <a:cs typeface="Ebrima"/>
               </a:rPr>
-              <a:t>ብርሃኔ ተገልጦ ደስ አለኝ አይቼ (3x)</a:t>
+              <a:t>ብርሃኔ ተገልጦ ደስ አለኝ አይቼ 3x</a:t>
             </a:r>
           </a:p>
           <a:p>
